--- a/morning-registration-activities/weekly-wonder/downloads/Weekly_Wonder_Year_10_and_11.pptx
+++ b/morning-registration-activities/weekly-wonder/downloads/Weekly_Wonder_Year_10_and_11.pptx
@@ -1423,8 +1423,8 @@
         </p:nvSpPr>
         <p:spPr>
           <a:xfrm>
-            <a:off x="5230368" y="1572768"/>
-            <a:ext cx="1737360" cy="365760"/>
+            <a:off x="5001768" y="1572768"/>
+            <a:ext cx="2194560" cy="365760"/>
           </a:xfrm>
           <a:prstGeom prst="roundRect">
             <a:avLst>
@@ -1449,8 +1449,8 @@
         </p:nvSpPr>
         <p:spPr>
           <a:xfrm>
-            <a:off x="5230368" y="1572768"/>
-            <a:ext cx="1737360" cy="365760"/>
+            <a:off x="5001768" y="1572768"/>
+            <a:ext cx="2194560" cy="365760"/>
           </a:xfrm>
           <a:prstGeom prst="rect">
             <a:avLst/>
@@ -2185,7 +2185,7 @@
                 <a:ea typeface="Karla" pitchFamily="34" charset="-122"/>
                 <a:cs typeface="Karla" pitchFamily="34" charset="-120"/>
               </a:rPr>
-              <a:t>Needs: nothing to prepare. Five questions are in this deck. The Year 10 and 11 set; two more sets are on the website.</a:t>
+              <a:t>Needs: nothing to prepare. This is the Year 10 and 11 set, five questions. Two more sets are on the website.</a:t>
             </a:r>
             <a:endParaRPr lang="en-US" sz="1200" dirty="0"/>
           </a:p>
@@ -2686,7 +2686,7 @@
                 <a:ea typeface="Libre Caslon Display" pitchFamily="34" charset="-122"/>
                 <a:cs typeface="Libre Caslon Display" pitchFamily="34" charset="-120"/>
               </a:rPr>
-              <a:t>If you could see one number about yourself that nobody else could, what would you want it to be?</a:t>
+              <a:t>If you could know one number about yourself that nobody else could see, which number would you choose?</a:t>
             </a:r>
             <a:endParaRPr lang="en-US" sz="3400" dirty="0"/>
           </a:p>

--- a/morning-registration-activities/weekly-wonder/downloads/Weekly_Wonder_Year_10_and_11.pptx
+++ b/morning-registration-activities/weekly-wonder/downloads/Weekly_Wonder_Year_10_and_11.pptx
@@ -2416,7 +2416,7 @@
                 <a:ea typeface="Libre Caslon Display" pitchFamily="34" charset="-122"/>
                 <a:cs typeface="Libre Caslon Display" pitchFamily="34" charset="-120"/>
               </a:rPr>
-              <a:t>Is there anything you would be relieved to be told you were not allowed to do?</a:t>
+              <a:t>Is it ever right to break a rule you think is unfair?</a:t>
             </a:r>
             <a:endParaRPr lang="en-US" sz="3400" dirty="0"/>
           </a:p>
@@ -2686,7 +2686,7 @@
                 <a:ea typeface="Libre Caslon Display" pitchFamily="34" charset="-122"/>
                 <a:cs typeface="Libre Caslon Display" pitchFamily="34" charset="-120"/>
               </a:rPr>
-              <a:t>If you could know one number about yourself that nobody else could see, which number would you choose?</a:t>
+              <a:t>Would you rather be famous for something you did not do, or unknown for something great you did?</a:t>
             </a:r>
             <a:endParaRPr lang="en-US" sz="3400" dirty="0"/>
           </a:p>
@@ -3496,7 +3496,7 @@
                 <a:ea typeface="Libre Caslon Display" pitchFamily="34" charset="-122"/>
                 <a:cs typeface="Libre Caslon Display" pitchFamily="34" charset="-120"/>
               </a:rPr>
-              <a:t>What would change in this school if nobody could see anybody else’s phone?</a:t>
+              <a:t>Is it better to be good at lots of things, or great at one?</a:t>
             </a:r>
             <a:endParaRPr lang="en-US" sz="3400" dirty="0"/>
           </a:p>

--- a/morning-registration-activities/weekly-wonder/downloads/Weekly_Wonder_Year_10_and_11.pptx
+++ b/morning-registration-activities/weekly-wonder/downloads/Weekly_Wonder_Year_10_and_11.pptx
@@ -1366,9 +1366,9 @@
                 <a:solidFill>
                   <a:srgbClr val="7C8FA6"/>
                 </a:solidFill>
-                <a:latin typeface="Karla" pitchFamily="34" charset="0"/>
-                <a:ea typeface="Karla" pitchFamily="34" charset="-122"/>
-                <a:cs typeface="Karla" pitchFamily="34" charset="-120"/>
+                <a:latin typeface="Calibri" pitchFamily="34" charset="0"/>
+                <a:ea typeface="Calibri" pitchFamily="34" charset="-122"/>
+                <a:cs typeface="Calibri" pitchFamily="34" charset="-120"/>
               </a:rPr>
               <a:t>MORNING REGISTRATION ACTIVITIES</a:t>
             </a:r>
@@ -1401,13 +1401,13 @@
               <a:buNone/>
             </a:pPr>
             <a:r>
-              <a:rPr lang="en-US" sz="4400" b="1" dirty="0">
+              <a:rPr lang="en-US" sz="4400" b="0" dirty="0">
                 <a:solidFill>
                   <a:srgbClr val="303C4A"/>
                 </a:solidFill>
-                <a:latin typeface="Libre Caslon Display" pitchFamily="34" charset="0"/>
-                <a:ea typeface="Libre Caslon Display" pitchFamily="34" charset="-122"/>
-                <a:cs typeface="Libre Caslon Display" pitchFamily="34" charset="-120"/>
+                <a:latin typeface="Georgia" pitchFamily="34" charset="0"/>
+                <a:ea typeface="Georgia" pitchFamily="34" charset="-122"/>
+                <a:cs typeface="Georgia" pitchFamily="34" charset="-120"/>
               </a:rPr>
               <a:t>Weekly Wonder</a:t>
             </a:r>
@@ -1470,9 +1470,9 @@
                 <a:solidFill>
                   <a:srgbClr val="FFFDF7"/>
                 </a:solidFill>
-                <a:latin typeface="Karla" pitchFamily="34" charset="0"/>
-                <a:ea typeface="Karla" pitchFamily="34" charset="-122"/>
-                <a:cs typeface="Karla" pitchFamily="34" charset="-120"/>
+                <a:latin typeface="Calibri" pitchFamily="34" charset="0"/>
+                <a:ea typeface="Calibri" pitchFamily="34" charset="-122"/>
+                <a:cs typeface="Calibri" pitchFamily="34" charset="-120"/>
               </a:rPr>
               <a:t>YEAR 10 AND 11</a:t>
             </a:r>
@@ -1509,9 +1509,9 @@
                 <a:solidFill>
                   <a:srgbClr val="455568"/>
                 </a:solidFill>
-                <a:latin typeface="Karla" pitchFamily="34" charset="0"/>
-                <a:ea typeface="Karla" pitchFamily="34" charset="-122"/>
-                <a:cs typeface="Karla" pitchFamily="34" charset="-120"/>
+                <a:latin typeface="Calibri" pitchFamily="34" charset="0"/>
+                <a:ea typeface="Calibri" pitchFamily="34" charset="-122"/>
+                <a:cs typeface="Calibri" pitchFamily="34" charset="-120"/>
               </a:rPr>
               <a:t>One open question, no right answer. Put it up, give it a minute of quiet, then see where the discussion goes.</a:t>
             </a:r>
@@ -1639,9 +1639,9 @@
                 <a:solidFill>
                   <a:srgbClr val="FFFDF7"/>
                 </a:solidFill>
-                <a:latin typeface="Karla" pitchFamily="34" charset="0"/>
-                <a:ea typeface="Karla" pitchFamily="34" charset="-122"/>
-                <a:cs typeface="Karla" pitchFamily="34" charset="-120"/>
+                <a:latin typeface="Calibri" pitchFamily="34" charset="0"/>
+                <a:ea typeface="Calibri" pitchFamily="34" charset="-122"/>
+                <a:cs typeface="Calibri" pitchFamily="34" charset="-120"/>
               </a:rPr>
               <a:t>1</a:t>
             </a:r>
@@ -1678,9 +1678,9 @@
                 <a:solidFill>
                   <a:srgbClr val="303C4A"/>
                 </a:solidFill>
-                <a:latin typeface="Karla" pitchFamily="34" charset="0"/>
-                <a:ea typeface="Karla" pitchFamily="34" charset="-122"/>
-                <a:cs typeface="Karla" pitchFamily="34" charset="-120"/>
+                <a:latin typeface="Calibri" pitchFamily="34" charset="0"/>
+                <a:ea typeface="Calibri" pitchFamily="34" charset="-122"/>
+                <a:cs typeface="Calibri" pitchFamily="34" charset="-120"/>
               </a:rPr>
               <a:t>Show the question</a:t>
             </a:r>
@@ -1720,9 +1720,9 @@
                 <a:solidFill>
                   <a:srgbClr val="455568"/>
                 </a:solidFill>
-                <a:latin typeface="Karla" pitchFamily="34" charset="0"/>
-                <a:ea typeface="Karla" pitchFamily="34" charset="-122"/>
-                <a:cs typeface="Karla" pitchFamily="34" charset="-120"/>
+                <a:latin typeface="Calibri" pitchFamily="34" charset="0"/>
+                <a:ea typeface="Calibri" pitchFamily="34" charset="-122"/>
+                <a:cs typeface="Calibri" pitchFamily="34" charset="-120"/>
               </a:rPr>
               <a:t>Pick any of the five slides and put it up. No introduction needed.</a:t>
             </a:r>
@@ -1850,9 +1850,9 @@
                 <a:solidFill>
                   <a:srgbClr val="FFFDF7"/>
                 </a:solidFill>
-                <a:latin typeface="Karla" pitchFamily="34" charset="0"/>
-                <a:ea typeface="Karla" pitchFamily="34" charset="-122"/>
-                <a:cs typeface="Karla" pitchFamily="34" charset="-120"/>
+                <a:latin typeface="Calibri" pitchFamily="34" charset="0"/>
+                <a:ea typeface="Calibri" pitchFamily="34" charset="-122"/>
+                <a:cs typeface="Calibri" pitchFamily="34" charset="-120"/>
               </a:rPr>
               <a:t>2</a:t>
             </a:r>
@@ -1889,9 +1889,9 @@
                 <a:solidFill>
                   <a:srgbClr val="303C4A"/>
                 </a:solidFill>
-                <a:latin typeface="Karla" pitchFamily="34" charset="0"/>
-                <a:ea typeface="Karla" pitchFamily="34" charset="-122"/>
-                <a:cs typeface="Karla" pitchFamily="34" charset="-120"/>
+                <a:latin typeface="Calibri" pitchFamily="34" charset="0"/>
+                <a:ea typeface="Calibri" pitchFamily="34" charset="-122"/>
+                <a:cs typeface="Calibri" pitchFamily="34" charset="-120"/>
               </a:rPr>
               <a:t>A minute of quiet</a:t>
             </a:r>
@@ -1931,9 +1931,9 @@
                 <a:solidFill>
                   <a:srgbClr val="455568"/>
                 </a:solidFill>
-                <a:latin typeface="Karla" pitchFamily="34" charset="0"/>
-                <a:ea typeface="Karla" pitchFamily="34" charset="-122"/>
-                <a:cs typeface="Karla" pitchFamily="34" charset="-120"/>
+                <a:latin typeface="Calibri" pitchFamily="34" charset="0"/>
+                <a:ea typeface="Calibri" pitchFamily="34" charset="-122"/>
+                <a:cs typeface="Calibri" pitchFamily="34" charset="-120"/>
               </a:rPr>
               <a:t>Give it a minute of quiet before anyone speaks. The best answers are rarely the fastest ones.</a:t>
             </a:r>
@@ -2061,9 +2061,9 @@
                 <a:solidFill>
                   <a:srgbClr val="FFFDF7"/>
                 </a:solidFill>
-                <a:latin typeface="Karla" pitchFamily="34" charset="0"/>
-                <a:ea typeface="Karla" pitchFamily="34" charset="-122"/>
-                <a:cs typeface="Karla" pitchFamily="34" charset="-120"/>
+                <a:latin typeface="Calibri" pitchFamily="34" charset="0"/>
+                <a:ea typeface="Calibri" pitchFamily="34" charset="-122"/>
+                <a:cs typeface="Calibri" pitchFamily="34" charset="-120"/>
               </a:rPr>
               <a:t>3</a:t>
             </a:r>
@@ -2100,9 +2100,9 @@
                 <a:solidFill>
                   <a:srgbClr val="303C4A"/>
                 </a:solidFill>
-                <a:latin typeface="Karla" pitchFamily="34" charset="0"/>
-                <a:ea typeface="Karla" pitchFamily="34" charset="-122"/>
-                <a:cs typeface="Karla" pitchFamily="34" charset="-120"/>
+                <a:latin typeface="Calibri" pitchFamily="34" charset="0"/>
+                <a:ea typeface="Calibri" pitchFamily="34" charset="-122"/>
+                <a:cs typeface="Calibri" pitchFamily="34" charset="-120"/>
               </a:rPr>
               <a:t>Open it up</a:t>
             </a:r>
@@ -2142,9 +2142,9 @@
                 <a:solidFill>
                   <a:srgbClr val="455568"/>
                 </a:solidFill>
-                <a:latin typeface="Karla" pitchFamily="34" charset="0"/>
-                <a:ea typeface="Karla" pitchFamily="34" charset="-122"/>
-                <a:cs typeface="Karla" pitchFamily="34" charset="-120"/>
+                <a:latin typeface="Calibri" pitchFamily="34" charset="0"/>
+                <a:ea typeface="Calibri" pitchFamily="34" charset="-122"/>
+                <a:cs typeface="Calibri" pitchFamily="34" charset="-120"/>
               </a:rPr>
               <a:t>There is no correct answer, so every answer is worth hearing.</a:t>
             </a:r>
@@ -2181,9 +2181,9 @@
                 <a:solidFill>
                   <a:srgbClr val="7C8FA6"/>
                 </a:solidFill>
-                <a:latin typeface="Karla" pitchFamily="34" charset="0"/>
-                <a:ea typeface="Karla" pitchFamily="34" charset="-122"/>
-                <a:cs typeface="Karla" pitchFamily="34" charset="-120"/>
+                <a:latin typeface="Calibri" pitchFamily="34" charset="0"/>
+                <a:ea typeface="Calibri" pitchFamily="34" charset="-122"/>
+                <a:cs typeface="Calibri" pitchFamily="34" charset="-120"/>
               </a:rPr>
               <a:t>Needs: nothing to prepare. This is the Year 10 and 11 set, five questions. Two more sets are on the website.</a:t>
             </a:r>
@@ -2244,9 +2244,9 @@
                 <a:solidFill>
                   <a:srgbClr val="7C8FA6"/>
                 </a:solidFill>
-                <a:latin typeface="Libre Caslon Display" pitchFamily="34" charset="0"/>
-                <a:ea typeface="Libre Caslon Display" pitchFamily="34" charset="-122"/>
-                <a:cs typeface="Libre Caslon Display" pitchFamily="34" charset="-120"/>
+                <a:latin typeface="Georgia" pitchFamily="34" charset="0"/>
+                <a:ea typeface="Georgia" pitchFamily="34" charset="-122"/>
+                <a:cs typeface="Georgia" pitchFamily="34" charset="-120"/>
               </a:rPr>
               <a:t>The Pastoral Guide</a:t>
             </a:r>
@@ -2332,9 +2332,9 @@
                 <a:solidFill>
                   <a:srgbClr val="7C8FA6"/>
                 </a:solidFill>
-                <a:latin typeface="Karla" pitchFamily="34" charset="0"/>
-                <a:ea typeface="Karla" pitchFamily="34" charset="-122"/>
-                <a:cs typeface="Karla" pitchFamily="34" charset="-120"/>
+                <a:latin typeface="Calibri" pitchFamily="34" charset="0"/>
+                <a:ea typeface="Calibri" pitchFamily="34" charset="-122"/>
+                <a:cs typeface="Calibri" pitchFamily="34" charset="-120"/>
               </a:rPr>
               <a:t>WEEKLY WONDER  ·  YEAR 10 AND 11  ·  NO. 1</a:t>
             </a:r>
@@ -2412,9 +2412,9 @@
                 <a:solidFill>
                   <a:srgbClr val="303C4A"/>
                 </a:solidFill>
-                <a:latin typeface="Libre Caslon Display" pitchFamily="34" charset="0"/>
-                <a:ea typeface="Libre Caslon Display" pitchFamily="34" charset="-122"/>
-                <a:cs typeface="Libre Caslon Display" pitchFamily="34" charset="-120"/>
+                <a:latin typeface="Georgia" pitchFamily="34" charset="0"/>
+                <a:ea typeface="Georgia" pitchFamily="34" charset="-122"/>
+                <a:cs typeface="Georgia" pitchFamily="34" charset="-120"/>
               </a:rPr>
               <a:t>Is it ever right to break a rule you think is unfair?</a:t>
             </a:r>
@@ -2451,9 +2451,9 @@
                 <a:solidFill>
                   <a:srgbClr val="455568"/>
                 </a:solidFill>
-                <a:latin typeface="Karla" pitchFamily="34" charset="0"/>
-                <a:ea typeface="Karla" pitchFamily="34" charset="-122"/>
-                <a:cs typeface="Karla" pitchFamily="34" charset="-120"/>
+                <a:latin typeface="Calibri" pitchFamily="34" charset="0"/>
+                <a:ea typeface="Calibri" pitchFamily="34" charset="-122"/>
+                <a:cs typeface="Calibri" pitchFamily="34" charset="-120"/>
               </a:rPr>
               <a:t>No right answer. What do you think?</a:t>
             </a:r>
@@ -2514,9 +2514,9 @@
                 <a:solidFill>
                   <a:srgbClr val="7C8FA6"/>
                 </a:solidFill>
-                <a:latin typeface="Libre Caslon Display" pitchFamily="34" charset="0"/>
-                <a:ea typeface="Libre Caslon Display" pitchFamily="34" charset="-122"/>
-                <a:cs typeface="Libre Caslon Display" pitchFamily="34" charset="-120"/>
+                <a:latin typeface="Georgia" pitchFamily="34" charset="0"/>
+                <a:ea typeface="Georgia" pitchFamily="34" charset="-122"/>
+                <a:cs typeface="Georgia" pitchFamily="34" charset="-120"/>
               </a:rPr>
               <a:t>The Pastoral Guide</a:t>
             </a:r>
@@ -2602,9 +2602,9 @@
                 <a:solidFill>
                   <a:srgbClr val="7C8FA6"/>
                 </a:solidFill>
-                <a:latin typeface="Karla" pitchFamily="34" charset="0"/>
-                <a:ea typeface="Karla" pitchFamily="34" charset="-122"/>
-                <a:cs typeface="Karla" pitchFamily="34" charset="-120"/>
+                <a:latin typeface="Calibri" pitchFamily="34" charset="0"/>
+                <a:ea typeface="Calibri" pitchFamily="34" charset="-122"/>
+                <a:cs typeface="Calibri" pitchFamily="34" charset="-120"/>
               </a:rPr>
               <a:t>WEEKLY WONDER  ·  YEAR 10 AND 11  ·  NO. 2</a:t>
             </a:r>
@@ -2682,9 +2682,9 @@
                 <a:solidFill>
                   <a:srgbClr val="303C4A"/>
                 </a:solidFill>
-                <a:latin typeface="Libre Caslon Display" pitchFamily="34" charset="0"/>
-                <a:ea typeface="Libre Caslon Display" pitchFamily="34" charset="-122"/>
-                <a:cs typeface="Libre Caslon Display" pitchFamily="34" charset="-120"/>
+                <a:latin typeface="Georgia" pitchFamily="34" charset="0"/>
+                <a:ea typeface="Georgia" pitchFamily="34" charset="-122"/>
+                <a:cs typeface="Georgia" pitchFamily="34" charset="-120"/>
               </a:rPr>
               <a:t>Would you rather be famous for something you did not do, or unknown for something great you did?</a:t>
             </a:r>
@@ -2721,9 +2721,9 @@
                 <a:solidFill>
                   <a:srgbClr val="455568"/>
                 </a:solidFill>
-                <a:latin typeface="Karla" pitchFamily="34" charset="0"/>
-                <a:ea typeface="Karla" pitchFamily="34" charset="-122"/>
-                <a:cs typeface="Karla" pitchFamily="34" charset="-120"/>
+                <a:latin typeface="Calibri" pitchFamily="34" charset="0"/>
+                <a:ea typeface="Calibri" pitchFamily="34" charset="-122"/>
+                <a:cs typeface="Calibri" pitchFamily="34" charset="-120"/>
               </a:rPr>
               <a:t>No right answer. What do you think?</a:t>
             </a:r>
@@ -2784,9 +2784,9 @@
                 <a:solidFill>
                   <a:srgbClr val="7C8FA6"/>
                 </a:solidFill>
-                <a:latin typeface="Libre Caslon Display" pitchFamily="34" charset="0"/>
-                <a:ea typeface="Libre Caslon Display" pitchFamily="34" charset="-122"/>
-                <a:cs typeface="Libre Caslon Display" pitchFamily="34" charset="-120"/>
+                <a:latin typeface="Georgia" pitchFamily="34" charset="0"/>
+                <a:ea typeface="Georgia" pitchFamily="34" charset="-122"/>
+                <a:cs typeface="Georgia" pitchFamily="34" charset="-120"/>
               </a:rPr>
               <a:t>The Pastoral Guide</a:t>
             </a:r>
@@ -2872,9 +2872,9 @@
                 <a:solidFill>
                   <a:srgbClr val="7C8FA6"/>
                 </a:solidFill>
-                <a:latin typeface="Karla" pitchFamily="34" charset="0"/>
-                <a:ea typeface="Karla" pitchFamily="34" charset="-122"/>
-                <a:cs typeface="Karla" pitchFamily="34" charset="-120"/>
+                <a:latin typeface="Calibri" pitchFamily="34" charset="0"/>
+                <a:ea typeface="Calibri" pitchFamily="34" charset="-122"/>
+                <a:cs typeface="Calibri" pitchFamily="34" charset="-120"/>
               </a:rPr>
               <a:t>WEEKLY WONDER  ·  YEAR 10 AND 11  ·  NO. 3</a:t>
             </a:r>
@@ -2952,9 +2952,9 @@
                 <a:solidFill>
                   <a:srgbClr val="303C4A"/>
                 </a:solidFill>
-                <a:latin typeface="Libre Caslon Display" pitchFamily="34" charset="0"/>
-                <a:ea typeface="Libre Caslon Display" pitchFamily="34" charset="-122"/>
-                <a:cs typeface="Libre Caslon Display" pitchFamily="34" charset="-120"/>
+                <a:latin typeface="Georgia" pitchFamily="34" charset="0"/>
+                <a:ea typeface="Georgia" pitchFamily="34" charset="-122"/>
+                <a:cs typeface="Georgia" pitchFamily="34" charset="-120"/>
               </a:rPr>
               <a:t>What is something adults say to teenagers that they do not say to each other?</a:t>
             </a:r>
@@ -2991,9 +2991,9 @@
                 <a:solidFill>
                   <a:srgbClr val="455568"/>
                 </a:solidFill>
-                <a:latin typeface="Karla" pitchFamily="34" charset="0"/>
-                <a:ea typeface="Karla" pitchFamily="34" charset="-122"/>
-                <a:cs typeface="Karla" pitchFamily="34" charset="-120"/>
+                <a:latin typeface="Calibri" pitchFamily="34" charset="0"/>
+                <a:ea typeface="Calibri" pitchFamily="34" charset="-122"/>
+                <a:cs typeface="Calibri" pitchFamily="34" charset="-120"/>
               </a:rPr>
               <a:t>No right answer. What do you think?</a:t>
             </a:r>
@@ -3054,9 +3054,9 @@
                 <a:solidFill>
                   <a:srgbClr val="7C8FA6"/>
                 </a:solidFill>
-                <a:latin typeface="Libre Caslon Display" pitchFamily="34" charset="0"/>
-                <a:ea typeface="Libre Caslon Display" pitchFamily="34" charset="-122"/>
-                <a:cs typeface="Libre Caslon Display" pitchFamily="34" charset="-120"/>
+                <a:latin typeface="Georgia" pitchFamily="34" charset="0"/>
+                <a:ea typeface="Georgia" pitchFamily="34" charset="-122"/>
+                <a:cs typeface="Georgia" pitchFamily="34" charset="-120"/>
               </a:rPr>
               <a:t>The Pastoral Guide</a:t>
             </a:r>
@@ -3142,9 +3142,9 @@
                 <a:solidFill>
                   <a:srgbClr val="7C8FA6"/>
                 </a:solidFill>
-                <a:latin typeface="Karla" pitchFamily="34" charset="0"/>
-                <a:ea typeface="Karla" pitchFamily="34" charset="-122"/>
-                <a:cs typeface="Karla" pitchFamily="34" charset="-120"/>
+                <a:latin typeface="Calibri" pitchFamily="34" charset="0"/>
+                <a:ea typeface="Calibri" pitchFamily="34" charset="-122"/>
+                <a:cs typeface="Calibri" pitchFamily="34" charset="-120"/>
               </a:rPr>
               <a:t>WEEKLY WONDER  ·  YEAR 10 AND 11  ·  NO. 4</a:t>
             </a:r>
@@ -3222,9 +3222,9 @@
                 <a:solidFill>
                   <a:srgbClr val="303C4A"/>
                 </a:solidFill>
-                <a:latin typeface="Libre Caslon Display" pitchFamily="34" charset="0"/>
-                <a:ea typeface="Libre Caslon Display" pitchFamily="34" charset="-122"/>
-                <a:cs typeface="Libre Caslon Display" pitchFamily="34" charset="-120"/>
+                <a:latin typeface="Georgia" pitchFamily="34" charset="0"/>
+                <a:ea typeface="Georgia" pitchFamily="34" charset="-122"/>
+                <a:cs typeface="Georgia" pitchFamily="34" charset="-120"/>
               </a:rPr>
               <a:t>When does trying hard start to look like showing off?</a:t>
             </a:r>
@@ -3261,9 +3261,9 @@
                 <a:solidFill>
                   <a:srgbClr val="455568"/>
                 </a:solidFill>
-                <a:latin typeface="Karla" pitchFamily="34" charset="0"/>
-                <a:ea typeface="Karla" pitchFamily="34" charset="-122"/>
-                <a:cs typeface="Karla" pitchFamily="34" charset="-120"/>
+                <a:latin typeface="Calibri" pitchFamily="34" charset="0"/>
+                <a:ea typeface="Calibri" pitchFamily="34" charset="-122"/>
+                <a:cs typeface="Calibri" pitchFamily="34" charset="-120"/>
               </a:rPr>
               <a:t>No right answer. What do you think?</a:t>
             </a:r>
@@ -3324,9 +3324,9 @@
                 <a:solidFill>
                   <a:srgbClr val="7C8FA6"/>
                 </a:solidFill>
-                <a:latin typeface="Libre Caslon Display" pitchFamily="34" charset="0"/>
-                <a:ea typeface="Libre Caslon Display" pitchFamily="34" charset="-122"/>
-                <a:cs typeface="Libre Caslon Display" pitchFamily="34" charset="-120"/>
+                <a:latin typeface="Georgia" pitchFamily="34" charset="0"/>
+                <a:ea typeface="Georgia" pitchFamily="34" charset="-122"/>
+                <a:cs typeface="Georgia" pitchFamily="34" charset="-120"/>
               </a:rPr>
               <a:t>The Pastoral Guide</a:t>
             </a:r>
@@ -3412,9 +3412,9 @@
                 <a:solidFill>
                   <a:srgbClr val="7C8FA6"/>
                 </a:solidFill>
-                <a:latin typeface="Karla" pitchFamily="34" charset="0"/>
-                <a:ea typeface="Karla" pitchFamily="34" charset="-122"/>
-                <a:cs typeface="Karla" pitchFamily="34" charset="-120"/>
+                <a:latin typeface="Calibri" pitchFamily="34" charset="0"/>
+                <a:ea typeface="Calibri" pitchFamily="34" charset="-122"/>
+                <a:cs typeface="Calibri" pitchFamily="34" charset="-120"/>
               </a:rPr>
               <a:t>WEEKLY WONDER  ·  YEAR 10 AND 11  ·  NO. 5</a:t>
             </a:r>
@@ -3492,9 +3492,9 @@
                 <a:solidFill>
                   <a:srgbClr val="303C4A"/>
                 </a:solidFill>
-                <a:latin typeface="Libre Caslon Display" pitchFamily="34" charset="0"/>
-                <a:ea typeface="Libre Caslon Display" pitchFamily="34" charset="-122"/>
-                <a:cs typeface="Libre Caslon Display" pitchFamily="34" charset="-120"/>
+                <a:latin typeface="Georgia" pitchFamily="34" charset="0"/>
+                <a:ea typeface="Georgia" pitchFamily="34" charset="-122"/>
+                <a:cs typeface="Georgia" pitchFamily="34" charset="-120"/>
               </a:rPr>
               <a:t>Is it better to be good at lots of things, or great at one?</a:t>
             </a:r>
@@ -3531,9 +3531,9 @@
                 <a:solidFill>
                   <a:srgbClr val="455568"/>
                 </a:solidFill>
-                <a:latin typeface="Karla" pitchFamily="34" charset="0"/>
-                <a:ea typeface="Karla" pitchFamily="34" charset="-122"/>
-                <a:cs typeface="Karla" pitchFamily="34" charset="-120"/>
+                <a:latin typeface="Calibri" pitchFamily="34" charset="0"/>
+                <a:ea typeface="Calibri" pitchFamily="34" charset="-122"/>
+                <a:cs typeface="Calibri" pitchFamily="34" charset="-120"/>
               </a:rPr>
               <a:t>No right answer. What do you think?</a:t>
             </a:r>
@@ -3594,9 +3594,9 @@
                 <a:solidFill>
                   <a:srgbClr val="7C8FA6"/>
                 </a:solidFill>
-                <a:latin typeface="Libre Caslon Display" pitchFamily="34" charset="0"/>
-                <a:ea typeface="Libre Caslon Display" pitchFamily="34" charset="-122"/>
-                <a:cs typeface="Libre Caslon Display" pitchFamily="34" charset="-120"/>
+                <a:latin typeface="Georgia" pitchFamily="34" charset="0"/>
+                <a:ea typeface="Georgia" pitchFamily="34" charset="-122"/>
+                <a:cs typeface="Georgia" pitchFamily="34" charset="-120"/>
               </a:rPr>
               <a:t>The Pastoral Guide</a:t>
             </a:r>
